--- a/docs/code_maps_pptx/xval_SVM_codemap.pptx
+++ b/docs/code_maps_pptx/xval_SVM_codemap.pptx
@@ -3096,8 +3096,8 @@
         </p:nvSpPr>
         <p:spPr>
           <a:xfrm>
-            <a:off x="2743200" y="137160"/>
-            <a:ext cx="6858000" cy="411480"/>
+            <a:off x="1828800" y="137160"/>
+            <a:ext cx="8503920" cy="411480"/>
           </a:xfrm>
           <a:prstGeom prst="rect">
             <a:avLst/>
@@ -3235,7 +3235,7 @@
                 </a:solidFill>
                 <a:latin typeface="Calibri"/>
               </a:rPr>
-              <a:t>Pass S = xval_SVM(X, Y, id, ...). X is observations × features; Y is the binary outcome; id keeps each subject's images together.</a:t>
+              <a:t>S = xval_SVM(X, Y, id, ...).</a:t>
             </a:r>
           </a:p>
           <a:p>
@@ -3259,7 +3259,7 @@
                 </a:solidFill>
                 <a:latin typeface="Calibri"/>
               </a:rPr>
-              <a:t>Toggle 'doOptimize', true for Bayesian hyperparameter optimization (5-fold inner CV).</a:t>
+              <a:t>X = obs × features, Y = binary, id groups subjects.</a:t>
             </a:r>
           </a:p>
           <a:p>
@@ -3283,7 +3283,7 @@
                 </a:solidFill>
                 <a:latin typeface="Calibri"/>
               </a:rPr>
-              <a:t>'doRepeats', N repeats the outer CV with N random splits to stabilize accuracy estimates.</a:t>
+              <a:t>'doOptimize' true → Bayesian hyperopt (5-fold inner CV).</a:t>
             </a:r>
           </a:p>
           <a:p>
@@ -3307,7 +3307,31 @@
                 </a:solidFill>
                 <a:latin typeface="Calibri"/>
               </a:rPr>
-              <a:t>'highdimensional', true switches to fitclinear (no hyperopt) for voxel-scale brain data.</a:t>
+              <a:t>'doRepeats', N → repeat outer CV with new splits.</a:t>
+            </a:r>
+          </a:p>
+          <a:p>
+            <a:pPr algn="l"/>
+            <a:r>
+              <a:rPr sz="1050" b="0">
+                <a:solidFill>
+                  <a:srgbClr val="262626"/>
+                </a:solidFill>
+                <a:latin typeface="Calibri"/>
+              </a:rPr>
+              <a:t/>
+            </a:r>
+          </a:p>
+          <a:p>
+            <a:pPr algn="l"/>
+            <a:r>
+              <a:rPr sz="1050" b="0">
+                <a:solidFill>
+                  <a:srgbClr val="262626"/>
+                </a:solidFill>
+                <a:latin typeface="Calibri"/>
+              </a:rPr>
+              <a:t>'highdimensional' true → fitclinear (voxel-scale).</a:t>
             </a:r>
           </a:p>
         </p:txBody>
@@ -3320,7 +3344,7 @@
         </p:nvSpPr>
         <p:spPr>
           <a:xfrm>
-            <a:off x="237744" y="3108960"/>
+            <a:off x="237744" y="3337560"/>
             <a:ext cx="640080" cy="228600"/>
           </a:xfrm>
           <a:prstGeom prst="rect">
@@ -3355,8 +3379,8 @@
         </p:nvSpPr>
         <p:spPr>
           <a:xfrm>
-            <a:off x="237744" y="3364991"/>
-            <a:ext cx="1920240" cy="1645920"/>
+            <a:off x="237744" y="3593591"/>
+            <a:ext cx="1920240" cy="1417320"/>
           </a:xfrm>
           <a:prstGeom prst="rect">
             <a:avLst/>
@@ -3377,7 +3401,7 @@
                 </a:solidFill>
                 <a:latin typeface="Calibri"/>
               </a:rPr>
-              <a:t>ROC accuracy and single-interval CV accuracy may differ — ROC_plot picks an optimal score threshold.</a:t>
+              <a:t>ROC and single-interval CV accuracy can differ; ROC_plot picks an optimal threshold.</a:t>
             </a:r>
           </a:p>
           <a:p>
@@ -3401,7 +3425,7 @@
                 </a:solidFill>
                 <a:latin typeface="Calibri"/>
               </a:rPr>
-              <a:t>Linear classifiers only; nonlinear models exist as commented-out hooks in the source.</a:t>
+              <a:t>Linear classifiers only; nonlinear hooks are commented out.</a:t>
             </a:r>
           </a:p>
           <a:p>
@@ -3425,7 +3449,7 @@
                 </a:solidFill>
                 <a:latin typeface="Calibri"/>
               </a:rPr>
-              <a:t>Optimizing hyperparameters AND repeating CV gives nested CV — slow but appropriate for unbiased estimates.</a:t>
+              <a:t>Hyperopt + repeated CV = nested CV. Slow but unbiased.</a:t>
             </a:r>
           </a:p>
         </p:txBody>
